--- a/decks/maths-perimeter-area/maths-perimeter-area_ch3_area-rectangles-parallelograms.pptx
+++ b/decks/maths-perimeter-area/maths-perimeter-area_ch3_area-rectangles-parallelograms.pptx
@@ -122,29 +122,29 @@
   <p:extLst>
     <p:ext uri="{521415D9-36F7-43E2-AB2F-B90AF26B5E84}">
       <p14:sectionLst xmlns:p14="http://schemas.microsoft.com/office/powerpoint/2010/main">
-        <p14:section name="Opening" id="{09988bb5-f8f3-47ea-af8c-64cd6d0a9f65}">
+        <p14:section name="Opening" id="{4ce762c1-880a-7171-e70e-ac788a17bc29}">
           <p14:sldIdLst>
             <p14:sldId id="256"/>
           </p14:sldIdLst>
         </p14:section>
-        <p14:section name="Gate" id="{469aa5ca-5564-78ab-c156-c4464af5ce27}">
+        <p14:section name="Gate" id="{11870a18-7ee1-5017-3e14-cd8a2968e22a}">
           <p14:sldIdLst>
             <p14:sldId id="257"/>
             <p14:sldId id="258"/>
           </p14:sldIdLst>
         </p14:section>
-        <p14:section name="Pre-teach" id="{e6d97145-269d-8976-2c8d-94df9041244b}">
+        <p14:section name="Pre-teach" id="{0a8b0856-d611-82df-8c6a-2c9ae0ffbf9b}">
           <p14:sldIdLst>
             <p14:sldId id="259"/>
           </p14:sldIdLst>
         </p14:section>
-        <p14:section name="Read-along" id="{fe252055-88f2-9098-3486-7f5f3a078e64}">
+        <p14:section name="Read-along" id="{cafd5ac2-2405-4fb0-64e0-9a0b249e5dda}">
           <p14:sldIdLst>
             <p14:sldId id="260"/>
             <p14:sldId id="261"/>
           </p14:sldIdLst>
         </p14:section>
-        <p14:section name="Teach" id="{5c997915-3f17-3f57-a841-e4d2252c66c0}">
+        <p14:section name="Teach" id="{210c2eba-fc4b-af50-b773-1f7489db5b5d}">
           <p14:sldIdLst>
             <p14:sldId id="262"/>
             <p14:sldId id="263"/>
@@ -152,18 +152,18 @@
             <p14:sldId id="265"/>
           </p14:sldIdLst>
         </p14:section>
-        <p14:section name="Routes" id="{c592d84a-0422-e0a8-bf99-50ac998dd3fe}">
+        <p14:section name="Routes" id="{465a6d8a-5ac2-d863-f51e-358ccc716f37}">
           <p14:sldIdLst>
             <p14:sldId id="266"/>
             <p14:sldId id="267"/>
           </p14:sldIdLst>
         </p14:section>
-        <p14:section name="Close" id="{bddc8c30-6c5c-09d5-e8fe-3e14a36939bd}">
+        <p14:section name="Close" id="{25081d43-afaf-dfda-8639-54496065f71d}">
           <p14:sldIdLst>
             <p14:sldId id="268"/>
           </p14:sldIdLst>
         </p14:section>
-        <p14:section name="Answers" id="{bb13c8d1-bda7-443b-c4d5-879e4a03e0ce}">
+        <p14:section name="Answers" id="{f6802aaf-ab66-e34c-1e8d-0db7bdfeb035}">
           <p14:sldIdLst>
             <p14:sldId id="269"/>
             <p14:sldId id="270"/>
@@ -1313,8 +1313,8 @@
               <a:rPr lang="en-US" dirty="0"/>
               <a:t>Do now — retrieval. Silent, no notes, no help: recall comes before any support. Give about four minutes.
 1. A rectangle is 7 cm long and 5 cm wide. What is its area?  →  35 cm²
-2. Which unit is used for area?  →  B   cm²
-3. A parallelogram has a base of 10 cm, a slanted side of 6 cm and a perpendicular height of 5 cm. Which calculation gives its area?  →  B   10 × 5
+2. Which unit is used for area?  →  C   cm²
+3. A parallelogram has a base of 10 cm, a slanted side of 6 cm and a perpendicular height of 5 cm. Which calculation gives its area?  →  A   10 × 5
 Circulate: who gets 3/3 (Stretch route), 2/3 (Core), 0–1 (Support)? Use this to route pupils later in the lesson.</a:t>
             </a:r>
             <a:endParaRPr lang="en-US" dirty="0"/>
@@ -1405,8 +1405,8 @@
               <a:rPr lang="en-US" dirty="0"/>
               <a:t>Answers — pupils mark their own in a different colour, then hands up for 3/3, 2/3, 1/3.
 1. 35 cm². Area of a rectangle = length × width = 7 × 5 = 35.
-2. B   cm². Area counts squares, so its unit is square centimetres, cm².
-3. B   10 × 5. Area of a parallelogram = base × perpendicular height = 10 × 5 = 50.
+2. C   cm². Area counts squares, so its unit is square centimetres, cm².
+3. A   10 × 5. Area of a parallelogram = base × perpendicular height = 10 × 5 = 50.
 Say the route each score points to: 3/3 Stretch, 2/3 Core, 0–1 Support. Pupils may choose to move up.</a:t>
             </a:r>
             <a:endParaRPr lang="en-US" dirty="0"/>
@@ -9031,7 +9031,7 @@
                 <a:ea typeface="Calibri" pitchFamily="34" charset="-122"/>
                 <a:cs typeface="Calibri" pitchFamily="34" charset="-120"/>
               </a:rPr>
-              <a:t>cm</a:t>
+              <a:t>cm³</a:t>
             </a:r>
             <a:endParaRPr lang="en-US" sz="2400" dirty="0"/>
           </a:p>
@@ -9068,7 +9068,7 @@
                 <a:ea typeface="Calibri" pitchFamily="34" charset="-122"/>
                 <a:cs typeface="Calibri" pitchFamily="34" charset="-120"/>
               </a:rPr>
-              <a:t>cm²</a:t>
+              <a:t>cm</a:t>
             </a:r>
             <a:endParaRPr lang="en-US" sz="2400" dirty="0"/>
           </a:p>
@@ -9105,7 +9105,7 @@
                 <a:ea typeface="Calibri" pitchFamily="34" charset="-122"/>
                 <a:cs typeface="Calibri" pitchFamily="34" charset="-120"/>
               </a:rPr>
-              <a:t>cm³</a:t>
+              <a:t>cm²</a:t>
             </a:r>
             <a:endParaRPr lang="en-US" sz="2400" dirty="0"/>
           </a:p>
@@ -9309,7 +9309,7 @@
                 <a:ea typeface="Calibri" pitchFamily="34" charset="-122"/>
                 <a:cs typeface="Calibri" pitchFamily="34" charset="-120"/>
               </a:rPr>
-              <a:t>10 × 6</a:t>
+              <a:t>10 × 5</a:t>
             </a:r>
             <a:endParaRPr lang="en-US" sz="2000" dirty="0"/>
           </a:p>
@@ -9346,7 +9346,7 @@
                 <a:ea typeface="Calibri" pitchFamily="34" charset="-122"/>
                 <a:cs typeface="Calibri" pitchFamily="34" charset="-120"/>
               </a:rPr>
-              <a:t>10 × 5</a:t>
+              <a:t>6 × 5</a:t>
             </a:r>
             <a:endParaRPr lang="en-US" sz="2000" dirty="0"/>
           </a:p>
@@ -9420,7 +9420,7 @@
                 <a:ea typeface="Calibri" pitchFamily="34" charset="-122"/>
                 <a:cs typeface="Calibri" pitchFamily="34" charset="-120"/>
               </a:rPr>
-              <a:t>6 × 5</a:t>
+              <a:t>10 × 6</a:t>
             </a:r>
             <a:endParaRPr lang="en-US" sz="2000" dirty="0"/>
           </a:p>
@@ -10071,7 +10071,7 @@
                 <a:ea typeface="Calibri" pitchFamily="34" charset="-122"/>
                 <a:cs typeface="Calibri" pitchFamily="34" charset="-120"/>
               </a:rPr>
-              <a:t>B   cm²</a:t>
+              <a:t>C   cm²</a:t>
             </a:r>
             <a:endParaRPr lang="en-US" sz="2200" dirty="0"/>
           </a:p>
@@ -10321,7 +10321,7 @@
                 <a:ea typeface="Calibri" pitchFamily="34" charset="-122"/>
                 <a:cs typeface="Calibri" pitchFamily="34" charset="-120"/>
               </a:rPr>
-              <a:t>B   10 × 5</a:t>
+              <a:t>A   10 × 5</a:t>
             </a:r>
             <a:endParaRPr lang="en-US" sz="2200" dirty="0"/>
           </a:p>

--- a/decks/maths-perimeter-area/maths-perimeter-area_ch3_area-rectangles-parallelograms.pptx
+++ b/decks/maths-perimeter-area/maths-perimeter-area_ch3_area-rectangles-parallelograms.pptx
@@ -122,29 +122,29 @@
   <p:extLst>
     <p:ext uri="{521415D9-36F7-43E2-AB2F-B90AF26B5E84}">
       <p14:sectionLst xmlns:p14="http://schemas.microsoft.com/office/powerpoint/2010/main">
-        <p14:section name="Opening" id="{4ce762c1-880a-7171-e70e-ac788a17bc29}">
+        <p14:section name="Opening" id="{f0c74494-4756-b10c-ca0c-d367554b8bd1}">
           <p14:sldIdLst>
             <p14:sldId id="256"/>
           </p14:sldIdLst>
         </p14:section>
-        <p14:section name="Gate" id="{11870a18-7ee1-5017-3e14-cd8a2968e22a}">
+        <p14:section name="Gate" id="{885e1ae0-e513-abec-4206-12e1dcff5979}">
           <p14:sldIdLst>
             <p14:sldId id="257"/>
             <p14:sldId id="258"/>
           </p14:sldIdLst>
         </p14:section>
-        <p14:section name="Pre-teach" id="{0a8b0856-d611-82df-8c6a-2c9ae0ffbf9b}">
+        <p14:section name="Pre-teach" id="{3c890d47-c0f4-2c92-87d7-acab827025f9}">
           <p14:sldIdLst>
             <p14:sldId id="259"/>
           </p14:sldIdLst>
         </p14:section>
-        <p14:section name="Read-along" id="{cafd5ac2-2405-4fb0-64e0-9a0b249e5dda}">
+        <p14:section name="Read-along" id="{0cf76b8b-59f5-7f1f-067f-5ec5802813cc}">
           <p14:sldIdLst>
             <p14:sldId id="260"/>
             <p14:sldId id="261"/>
           </p14:sldIdLst>
         </p14:section>
-        <p14:section name="Teach" id="{210c2eba-fc4b-af50-b773-1f7489db5b5d}">
+        <p14:section name="Teach" id="{5c5c8b3f-5c3a-3208-924c-b48d3e312fde}">
           <p14:sldIdLst>
             <p14:sldId id="262"/>
             <p14:sldId id="263"/>
@@ -152,18 +152,18 @@
             <p14:sldId id="265"/>
           </p14:sldIdLst>
         </p14:section>
-        <p14:section name="Routes" id="{465a6d8a-5ac2-d863-f51e-358ccc716f37}">
+        <p14:section name="Routes" id="{955de156-df00-8163-d331-4815d22d13b7}">
           <p14:sldIdLst>
             <p14:sldId id="266"/>
             <p14:sldId id="267"/>
           </p14:sldIdLst>
         </p14:section>
-        <p14:section name="Close" id="{25081d43-afaf-dfda-8639-54496065f71d}">
+        <p14:section name="Close" id="{b2733f7f-4a76-74f7-680a-7ec2f14e85f9}">
           <p14:sldIdLst>
             <p14:sldId id="268"/>
           </p14:sldIdLst>
         </p14:section>
-        <p14:section name="Answers" id="{f6802aaf-ab66-e34c-1e8d-0db7bdfeb035}">
+        <p14:section name="Answers" id="{a46b1779-157b-9a43-aa26-7bc74228191c}">
           <p14:sldIdLst>
             <p14:sldId id="269"/>
             <p14:sldId id="270"/>
